--- a/docs/deck/Sahayak_Jury_Round_Deck.pptx
+++ b/docs/deck/Sahayak_Jury_Round_Deck.pptx
@@ -684,7 +684,7 @@
           <a:p>
             <a:r>
               <a:rPr lang="en-US" dirty="0"/>
-              <a:t>Stop talking and let them try; walk round with the demo phone for anyone whose phone will not load it, and never debug a judge's phone. Check before Delhi which fraud pack the public site serves: until it is rebuilt with the 7 Oct packs it has no "Could not check" verdict, so do not try a message in another Indian language there; show that on the node.</a:t>
+              <a:t>Stop talking and let them try; walk round with the demo phone for anyone whose phone will not load it, and never debug a judge's phone. The public site was rebuilt on 7 Oct with the node's packs (fraud 1.7.0), "Could not check" included; before Delhi, open phone-packs/fraud.json on the site and check it matches the node page.</a:t>
             </a:r>
             <a:endParaRPr lang="en-US" dirty="0"/>
           </a:p>
@@ -4241,7 +4241,7 @@
                 <a:ea typeface="Calibri" pitchFamily="34" charset="-122"/>
                 <a:cs typeface="Calibri" pitchFamily="34" charset="-120"/>
               </a:rPr>
-              <a:t>After one visit the phone runs the same engines offline: the node's exact answer on 1,490 of 1,490 test checks.</a:t>
+              <a:t>After one visit the phone runs the same engines offline: the node's exact answer on 1,841 of 1,841 test checks.</a:t>
             </a:r>
             <a:endParaRPr lang="en-US" sz="1500" dirty="0"/>
           </a:p>
@@ -5548,7 +5548,7 @@
               <a:buNone/>
             </a:pPr>
             <a:r>
-              <a:rPr lang="en-US" sz="1400" dirty="0">
+              <a:rPr lang="en-US" sz="1300" dirty="0">
                 <a:solidFill>
                   <a:srgbClr val="9DB0A4"/>
                 </a:solidFill>
@@ -5556,9 +5556,9 @@
                 <a:ea typeface="Calibri" pitchFamily="34" charset="-122"/>
                 <a:cs typeface="Calibri" pitchFamily="34" charset="-120"/>
               </a:rPr>
-              <a:t>137 messages published by the Income Tax portal, PIB Fact Check, courts and fact-checkers, gathered by an AI research agent that never saw the code.</a:t>
-            </a:r>
-            <a:endParaRPr lang="en-US" sz="1400" dirty="0"/>
+              <a:t>137 messages published by the Income Tax portal, PIB Fact Check, courts and fact-checkers; gathered by an AI agent that never saw the code.</a:t>
+            </a:r>
+            <a:endParaRPr lang="en-US" sz="1300" dirty="0"/>
           </a:p>
           <a:p>
             <a:pPr indent="0" marL="0">
@@ -5568,7 +5568,7 @@
               <a:buNone/>
             </a:pPr>
             <a:r>
-              <a:rPr lang="en-US" sz="1400" dirty="0">
+              <a:rPr lang="en-US" sz="1300" dirty="0">
                 <a:solidFill>
                   <a:srgbClr val="9DB0A4"/>
                 </a:solidFill>
@@ -5578,7 +5578,7 @@
               </a:rPr>
               <a:t>Keyword blocklist: 62 of 97 caught, 17 of 34 flagged. Other languages: 6 of 6 scams “Could not check”, 0 green.</a:t>
             </a:r>
-            <a:endParaRPr lang="en-US" sz="1400" dirty="0"/>
+            <a:endParaRPr lang="en-US" sz="1300" dirty="0"/>
           </a:p>
           <a:p>
             <a:pPr indent="0" marL="0">
@@ -5588,7 +5588,7 @@
               <a:buNone/>
             </a:pPr>
             <a:r>
-              <a:rPr lang="en-US" sz="1400" dirty="0">
+              <a:rPr lang="en-US" sz="1300" dirty="0">
                 <a:solidFill>
                   <a:srgbClr val="EEF3EE"/>
                 </a:solidFill>
@@ -5596,9 +5596,9 @@
                 <a:ea typeface="Calibri" pitchFamily="34" charset="-122"/>
                 <a:cs typeface="Calibri" pitchFamily="34" charset="-120"/>
               </a:rPr>
-              <a:t>Fixes learned from one half only. The unread half: 30 of 44 caught (first run 28), 6 of 20 flagged (first run 6).</a:t>
-            </a:r>
-            <a:endParaRPr lang="en-US" sz="1400" dirty="0"/>
+              <a:t>Fixes learned from one half only. The unread half: 31 of 44 caught (was 28), 6 of 20 flagged (was 6).</a:t>
+            </a:r>
+            <a:endParaRPr lang="en-US" sz="1300" dirty="0"/>
           </a:p>
         </p:txBody>
       </p:sp>
@@ -5800,7 +5800,7 @@
                 <a:ea typeface="Calibri" pitchFamily="34" charset="-122"/>
                 <a:cs typeface="Calibri" pitchFamily="34" charset="-120"/>
               </a:rPr>
-              <a:t>182 messages written by a separate AI model that never saw the code. Genuine flagged: 14 of 59.</a:t>
+              <a:t>182 by an AI model that never saw the code; 14 of 59 genuine flagged.</a:t>
             </a:r>
             <a:endParaRPr lang="en-US" sz="1400" dirty="0"/>
           </a:p>

--- a/docs/deck/Sahayak_Jury_Round_Deck.pptx
+++ b/docs/deck/Sahayak_Jury_Round_Deck.pptx
@@ -684,7 +684,7 @@
           <a:p>
             <a:r>
               <a:rPr lang="en-US" dirty="0"/>
-              <a:t>Stop talking and let them try; walk round with the demo phone for anyone whose phone will not load it, and never debug a judge's phone. The public site was rebuilt on 7 Oct with the node's packs (fraud 1.7.0), "Could not check" included; before Delhi, open phone-packs/fraud.json on the site and check it matches the node page.</a:t>
+              <a:t>Stop talking and let them try; walk round with the demo phone for anyone whose phone will not load it, and never debug a judge's phone. The public site was rebuilt on 8 Oct with the node's packs and the redesigned app (fraud 1.7.0), "Could not check" included; before Delhi, open phone-packs/fraud.json on the site and check it matches the node page.</a:t>
             </a:r>
             <a:endParaRPr lang="en-US" dirty="0"/>
           </a:p>
@@ -1391,7 +1391,7 @@
     <p:bg>
       <p:bgPr>
         <a:solidFill>
-          <a:srgbClr val="0B0F14"/>
+          <a:srgbClr val="101010"/>
         </a:solidFill>
       </p:bgPr>
     </p:bg>
@@ -1424,7 +1424,7 @@
             <a:avLst/>
           </a:prstGeom>
           <a:solidFill>
-            <a:srgbClr val="FF9E3D"/>
+            <a:srgbClr val="FF9933"/>
           </a:solidFill>
           <a:ln/>
         </p:spPr>
@@ -1444,7 +1444,7 @@
             <a:avLst/>
           </a:prstGeom>
           <a:solidFill>
-            <a:srgbClr val="EEF3EE"/>
+            <a:srgbClr val="FFFFFF"/>
           </a:solidFill>
           <a:ln/>
         </p:spPr>
@@ -1464,7 +1464,7 @@
             <a:avLst/>
           </a:prstGeom>
           <a:solidFill>
-            <a:srgbClr val="27C08A"/>
+            <a:srgbClr val="138808"/>
           </a:solidFill>
           <a:ln/>
         </p:spPr>
@@ -1496,7 +1496,7 @@
             <a:r>
               <a:rPr lang="en-US" sz="6000" b="1" spc="100" kern="0" dirty="0">
                 <a:solidFill>
-                  <a:srgbClr val="EEF3EE"/>
+                  <a:srgbClr val="F5F5F7"/>
                 </a:solidFill>
                 <a:latin typeface="Arial" pitchFamily="34" charset="0"/>
                 <a:ea typeface="Arial" pitchFamily="34" charset="-122"/>
@@ -1510,7 +1510,7 @@
             <a:r>
               <a:rPr lang="en-US" sz="4000" b="1" spc="100" kern="0" dirty="0">
                 <a:solidFill>
-                  <a:srgbClr val="27C08A"/>
+                  <a:srgbClr val="6FA8FF"/>
                 </a:solidFill>
                 <a:latin typeface="Nirmala UI" pitchFamily="34" charset="0"/>
                 <a:ea typeface="Nirmala UI" pitchFamily="34" charset="-122"/>
@@ -1549,7 +1549,7 @@
             <a:r>
               <a:rPr lang="en-US" sz="2400" b="1" dirty="0">
                 <a:solidFill>
-                  <a:srgbClr val="27C08A"/>
+                  <a:srgbClr val="6FA8FF"/>
                 </a:solidFill>
                 <a:latin typeface="Arial" pitchFamily="34" charset="0"/>
                 <a:ea typeface="Arial" pitchFamily="34" charset="-122"/>
@@ -1576,7 +1576,7 @@
             <a:avLst/>
           </a:prstGeom>
           <a:solidFill>
-            <a:srgbClr val="FF9E3D"/>
+            <a:srgbClr val="E2C28A"/>
           </a:solidFill>
           <a:ln/>
         </p:spPr>
@@ -1611,7 +1611,7 @@
             <a:r>
               <a:rPr lang="en-US" sz="3000" b="1" dirty="0">
                 <a:solidFill>
-                  <a:srgbClr val="EEF3EE"/>
+                  <a:srgbClr val="F5F5F7"/>
                 </a:solidFill>
                 <a:latin typeface="Arial" pitchFamily="34" charset="0"/>
                 <a:ea typeface="Arial" pitchFamily="34" charset="-122"/>
@@ -1631,7 +1631,7 @@
             <a:r>
               <a:rPr lang="en-US" sz="3000" b="1" dirty="0">
                 <a:solidFill>
-                  <a:srgbClr val="EEF3EE"/>
+                  <a:srgbClr val="F5F5F7"/>
                 </a:solidFill>
                 <a:latin typeface="Arial" pitchFamily="34" charset="0"/>
                 <a:ea typeface="Arial" pitchFamily="34" charset="-122"/>
@@ -1670,7 +1670,7 @@
             <a:r>
               <a:rPr lang="en-US" sz="1800" dirty="0">
                 <a:solidFill>
-                  <a:srgbClr val="9DB0A4"/>
+                  <a:srgbClr val="B4B4B8"/>
                 </a:solidFill>
                 <a:latin typeface="Calibri" pitchFamily="34" charset="0"/>
                 <a:ea typeface="Calibri" pitchFamily="34" charset="-122"/>
@@ -1709,7 +1709,7 @@
             <a:r>
               <a:rPr lang="en-US" sz="1600" b="1" dirty="0">
                 <a:solidFill>
-                  <a:srgbClr val="EEF3EE"/>
+                  <a:srgbClr val="F5F5F7"/>
                 </a:solidFill>
                 <a:latin typeface="Calibri" pitchFamily="34" charset="0"/>
                 <a:ea typeface="Calibri" pitchFamily="34" charset="-122"/>
@@ -1723,7 +1723,7 @@
             <a:r>
               <a:rPr lang="en-US" sz="1600" dirty="0">
                 <a:solidFill>
-                  <a:srgbClr val="9DB0A4"/>
+                  <a:srgbClr val="B4B4B8"/>
                 </a:solidFill>
                 <a:latin typeface="Calibri" pitchFamily="34" charset="0"/>
                 <a:ea typeface="Calibri" pitchFamily="34" charset="-122"/>
@@ -1762,7 +1762,7 @@
             <a:r>
               <a:rPr lang="en-US" sz="1600" dirty="0">
                 <a:solidFill>
-                  <a:srgbClr val="9DB0A4"/>
+                  <a:srgbClr val="B4B4B8"/>
                 </a:solidFill>
                 <a:latin typeface="Calibri" pitchFamily="34" charset="0"/>
                 <a:ea typeface="Calibri" pitchFamily="34" charset="-122"/>
@@ -1788,7 +1788,7 @@
     <p:bg>
       <p:bgPr>
         <a:solidFill>
-          <a:srgbClr val="0B0F14"/>
+          <a:srgbClr val="101010"/>
         </a:solidFill>
       </p:bgPr>
     </p:bg>
@@ -1821,7 +1821,7 @@
             <a:avLst/>
           </a:prstGeom>
           <a:solidFill>
-            <a:srgbClr val="FF9E3D"/>
+            <a:srgbClr val="FF9933"/>
           </a:solidFill>
           <a:ln/>
         </p:spPr>
@@ -1841,7 +1841,7 @@
             <a:avLst/>
           </a:prstGeom>
           <a:solidFill>
-            <a:srgbClr val="EEF3EE"/>
+            <a:srgbClr val="FFFFFF"/>
           </a:solidFill>
           <a:ln/>
         </p:spPr>
@@ -1861,7 +1861,7 @@
             <a:avLst/>
           </a:prstGeom>
           <a:solidFill>
-            <a:srgbClr val="27C08A"/>
+            <a:srgbClr val="138808"/>
           </a:solidFill>
           <a:ln/>
         </p:spPr>
@@ -1881,7 +1881,7 @@
             <a:avLst/>
           </a:prstGeom>
           <a:solidFill>
-            <a:srgbClr val="27C08A"/>
+            <a:srgbClr val="6FA8FF"/>
           </a:solidFill>
           <a:ln/>
         </p:spPr>
@@ -1913,7 +1913,7 @@
             <a:r>
               <a:rPr lang="en-US" sz="1500" b="1" spc="200" kern="0" dirty="0">
                 <a:solidFill>
-                  <a:srgbClr val="27C08A"/>
+                  <a:srgbClr val="6FA8FF"/>
                 </a:solidFill>
                 <a:latin typeface="Arial" pitchFamily="34" charset="0"/>
                 <a:ea typeface="Arial" pitchFamily="34" charset="-122"/>
@@ -1952,7 +1952,7 @@
             <a:r>
               <a:rPr lang="en-US" sz="3200" b="1" dirty="0">
                 <a:solidFill>
-                  <a:srgbClr val="EEF3EE"/>
+                  <a:srgbClr val="F5F5F7"/>
                 </a:solidFill>
                 <a:latin typeface="Arial" pitchFamily="34" charset="0"/>
                 <a:ea typeface="Arial" pitchFamily="34" charset="-122"/>
@@ -1981,11 +1981,11 @@
             </a:avLst>
           </a:prstGeom>
           <a:solidFill>
-            <a:srgbClr val="1B2A20"/>
+            <a:srgbClr val="26262B"/>
           </a:solidFill>
           <a:ln w="12700">
             <a:solidFill>
-              <a:srgbClr val="2C4636"/>
+              <a:srgbClr val="34343A"/>
             </a:solidFill>
             <a:prstDash val="solid"/>
           </a:ln>
@@ -2025,7 +2025,7 @@
             <a:r>
               <a:rPr lang="en-US" sz="5200" b="1" dirty="0">
                 <a:solidFill>
-                  <a:srgbClr val="FF9E3D"/>
+                  <a:srgbClr val="E2C28A"/>
                 </a:solidFill>
                 <a:latin typeface="Arial" pitchFamily="34" charset="0"/>
                 <a:ea typeface="Arial" pitchFamily="34" charset="-122"/>
@@ -2064,7 +2064,7 @@
             <a:r>
               <a:rPr lang="en-US" sz="3000" b="1" dirty="0">
                 <a:solidFill>
-                  <a:srgbClr val="FF9E3D"/>
+                  <a:srgbClr val="E2C28A"/>
                 </a:solidFill>
                 <a:latin typeface="Arial" pitchFamily="34" charset="0"/>
                 <a:ea typeface="Arial" pitchFamily="34" charset="-122"/>
@@ -2103,7 +2103,7 @@
             <a:r>
               <a:rPr lang="en-US" sz="2100" dirty="0">
                 <a:solidFill>
-                  <a:srgbClr val="EEF3EE"/>
+                  <a:srgbClr val="F5F5F7"/>
                 </a:solidFill>
                 <a:latin typeface="Calibri" pitchFamily="34" charset="0"/>
                 <a:ea typeface="Calibri" pitchFamily="34" charset="-122"/>
@@ -2132,11 +2132,11 @@
             </a:avLst>
           </a:prstGeom>
           <a:solidFill>
-            <a:srgbClr val="152017"/>
+            <a:srgbClr val="1C1C20"/>
           </a:solidFill>
           <a:ln w="12700">
             <a:solidFill>
-              <a:srgbClr val="2C4636"/>
+              <a:srgbClr val="34343A"/>
             </a:solidFill>
             <a:prstDash val="solid"/>
           </a:ln>
@@ -2176,7 +2176,7 @@
             <a:r>
               <a:rPr lang="en-US" sz="1300" b="1" spc="100" kern="0" dirty="0">
                 <a:solidFill>
-                  <a:srgbClr val="FF9E3D"/>
+                  <a:srgbClr val="E2C28A"/>
                 </a:solidFill>
                 <a:latin typeface="Arial" pitchFamily="34" charset="0"/>
                 <a:ea typeface="Arial" pitchFamily="34" charset="-122"/>
@@ -2215,7 +2215,7 @@
             <a:r>
               <a:rPr lang="en-US" sz="1800" b="1" dirty="0">
                 <a:solidFill>
-                  <a:srgbClr val="EEF3EE"/>
+                  <a:srgbClr val="F5F5F7"/>
                 </a:solidFill>
                 <a:latin typeface="Arial" pitchFamily="34" charset="0"/>
                 <a:ea typeface="Arial" pitchFamily="34" charset="-122"/>
@@ -2254,7 +2254,7 @@
             <a:r>
               <a:rPr lang="en-US" sz="1600" dirty="0">
                 <a:solidFill>
-                  <a:srgbClr val="9DB0A4"/>
+                  <a:srgbClr val="B4B4B8"/>
                 </a:solidFill>
                 <a:latin typeface="Calibri" pitchFamily="34" charset="0"/>
                 <a:ea typeface="Calibri" pitchFamily="34" charset="-122"/>
@@ -2283,7 +2283,7 @@
             </a:avLst>
           </a:prstGeom>
           <a:solidFill>
-            <a:srgbClr val="26372B"/>
+            <a:srgbClr val="26262B"/>
           </a:solidFill>
           <a:ln/>
         </p:spPr>
@@ -2315,7 +2315,7 @@
             <a:r>
               <a:rPr lang="en-US" sz="1600" dirty="0">
                 <a:solidFill>
-                  <a:srgbClr val="EEF3EE"/>
+                  <a:srgbClr val="F5F5F7"/>
                 </a:solidFill>
                 <a:latin typeface="Nirmala UI" pitchFamily="34" charset="0"/>
                 <a:ea typeface="Nirmala UI" pitchFamily="34" charset="-122"/>
@@ -2354,7 +2354,7 @@
             <a:r>
               <a:rPr lang="en-US" sz="1600" dirty="0">
                 <a:solidFill>
-                  <a:srgbClr val="9DB0A4"/>
+                  <a:srgbClr val="B4B4B8"/>
                 </a:solidFill>
                 <a:latin typeface="Calibri" pitchFamily="34" charset="0"/>
                 <a:ea typeface="Calibri" pitchFamily="34" charset="-122"/>
@@ -2393,7 +2393,7 @@
             <a:r>
               <a:rPr lang="en-US" sz="1700" b="1" dirty="0">
                 <a:solidFill>
-                  <a:srgbClr val="27C08A"/>
+                  <a:srgbClr val="6FA8FF"/>
                 </a:solidFill>
                 <a:latin typeface="Calibri" pitchFamily="34" charset="0"/>
                 <a:ea typeface="Calibri" pitchFamily="34" charset="-122"/>
@@ -2456,7 +2456,7 @@
             <a:r>
               <a:rPr lang="en-US" sz="1500" b="1" dirty="0">
                 <a:solidFill>
-                  <a:srgbClr val="EEF3EE"/>
+                  <a:srgbClr val="F5F5F7"/>
                 </a:solidFill>
                 <a:latin typeface="Calibri" pitchFamily="34" charset="0"/>
                 <a:ea typeface="Calibri" pitchFamily="34" charset="-122"/>
@@ -2495,7 +2495,7 @@
             <a:r>
               <a:rPr lang="en-US" sz="1200" dirty="0">
                 <a:solidFill>
-                  <a:srgbClr val="6E8579"/>
+                  <a:srgbClr val="7E7E84"/>
                 </a:solidFill>
                 <a:latin typeface="Calibri" pitchFamily="34" charset="0"/>
                 <a:ea typeface="Calibri" pitchFamily="34" charset="-122"/>
@@ -2521,7 +2521,7 @@
     <p:bg>
       <p:bgPr>
         <a:solidFill>
-          <a:srgbClr val="0B0F14"/>
+          <a:srgbClr val="101010"/>
         </a:solidFill>
       </p:bgPr>
     </p:bg>
@@ -2554,7 +2554,7 @@
             <a:avLst/>
           </a:prstGeom>
           <a:solidFill>
-            <a:srgbClr val="FF9E3D"/>
+            <a:srgbClr val="FF9933"/>
           </a:solidFill>
           <a:ln/>
         </p:spPr>
@@ -2574,7 +2574,7 @@
             <a:avLst/>
           </a:prstGeom>
           <a:solidFill>
-            <a:srgbClr val="EEF3EE"/>
+            <a:srgbClr val="FFFFFF"/>
           </a:solidFill>
           <a:ln/>
         </p:spPr>
@@ -2594,7 +2594,7 @@
             <a:avLst/>
           </a:prstGeom>
           <a:solidFill>
-            <a:srgbClr val="27C08A"/>
+            <a:srgbClr val="138808"/>
           </a:solidFill>
           <a:ln/>
         </p:spPr>
@@ -2614,7 +2614,7 @@
             <a:avLst/>
           </a:prstGeom>
           <a:solidFill>
-            <a:srgbClr val="27C08A"/>
+            <a:srgbClr val="6FA8FF"/>
           </a:solidFill>
           <a:ln/>
         </p:spPr>
@@ -2646,7 +2646,7 @@
             <a:r>
               <a:rPr lang="en-US" sz="1500" b="1" spc="200" kern="0" dirty="0">
                 <a:solidFill>
-                  <a:srgbClr val="27C08A"/>
+                  <a:srgbClr val="6FA8FF"/>
                 </a:solidFill>
                 <a:latin typeface="Arial" pitchFamily="34" charset="0"/>
                 <a:ea typeface="Arial" pitchFamily="34" charset="-122"/>
@@ -2685,7 +2685,7 @@
             <a:r>
               <a:rPr lang="en-US" sz="3200" b="1" dirty="0">
                 <a:solidFill>
-                  <a:srgbClr val="EEF3EE"/>
+                  <a:srgbClr val="F5F5F7"/>
                 </a:solidFill>
                 <a:latin typeface="Arial" pitchFamily="34" charset="0"/>
                 <a:ea typeface="Arial" pitchFamily="34" charset="-122"/>
@@ -2770,7 +2770,7 @@
             <a:r>
               <a:rPr lang="en-US" sz="1800" b="1" dirty="0">
                 <a:solidFill>
-                  <a:srgbClr val="27C08A"/>
+                  <a:srgbClr val="6FA8FF"/>
                 </a:solidFill>
                 <a:latin typeface="Calibri" pitchFamily="34" charset="0"/>
                 <a:ea typeface="Calibri" pitchFamily="34" charset="-122"/>
@@ -2809,7 +2809,7 @@
             <a:r>
               <a:rPr lang="en-US" sz="2100" b="1" dirty="0">
                 <a:solidFill>
-                  <a:srgbClr val="EEF3EE"/>
+                  <a:srgbClr val="F5F5F7"/>
                 </a:solidFill>
                 <a:latin typeface="Arial" pitchFamily="34" charset="0"/>
                 <a:ea typeface="Arial" pitchFamily="34" charset="-122"/>
@@ -2838,11 +2838,11 @@
             </a:avLst>
           </a:prstGeom>
           <a:solidFill>
-            <a:srgbClr val="152017"/>
+            <a:srgbClr val="1C1C20"/>
           </a:solidFill>
           <a:ln w="12700">
             <a:solidFill>
-              <a:srgbClr val="2C4636"/>
+              <a:srgbClr val="34343A"/>
             </a:solidFill>
             <a:prstDash val="solid"/>
           </a:ln>
@@ -2870,7 +2870,7 @@
             <a:avLst/>
           </a:prstGeom>
           <a:solidFill>
-            <a:srgbClr val="27C08A"/>
+            <a:srgbClr val="6FA8FF"/>
           </a:solidFill>
           <a:ln/>
         </p:spPr>
@@ -2902,7 +2902,7 @@
             <a:r>
               <a:rPr lang="en-US" sz="1800" b="1" dirty="0">
                 <a:solidFill>
-                  <a:srgbClr val="0B0F14"/>
+                  <a:srgbClr val="101010"/>
                 </a:solidFill>
                 <a:latin typeface="Arial" pitchFamily="34" charset="0"/>
                 <a:ea typeface="Arial" pitchFamily="34" charset="-122"/>
@@ -2941,7 +2941,7 @@
             <a:r>
               <a:rPr lang="en-US" sz="2000" b="1" dirty="0">
                 <a:solidFill>
-                  <a:srgbClr val="EEF3EE"/>
+                  <a:srgbClr val="F5F5F7"/>
                 </a:solidFill>
                 <a:latin typeface="Arial" pitchFamily="34" charset="0"/>
                 <a:ea typeface="Arial" pitchFamily="34" charset="-122"/>
@@ -2980,7 +2980,7 @@
             <a:r>
               <a:rPr lang="en-US" sz="1700" dirty="0">
                 <a:solidFill>
-                  <a:srgbClr val="9DB0A4"/>
+                  <a:srgbClr val="B4B4B8"/>
                 </a:solidFill>
                 <a:latin typeface="Calibri" pitchFamily="34" charset="0"/>
                 <a:ea typeface="Calibri" pitchFamily="34" charset="-122"/>
@@ -3009,11 +3009,11 @@
             </a:avLst>
           </a:prstGeom>
           <a:solidFill>
-            <a:srgbClr val="152017"/>
+            <a:srgbClr val="1C1C20"/>
           </a:solidFill>
           <a:ln w="12700">
             <a:solidFill>
-              <a:srgbClr val="2C4636"/>
+              <a:srgbClr val="34343A"/>
             </a:solidFill>
             <a:prstDash val="solid"/>
           </a:ln>
@@ -3041,7 +3041,7 @@
             <a:avLst/>
           </a:prstGeom>
           <a:solidFill>
-            <a:srgbClr val="27C08A"/>
+            <a:srgbClr val="6FA8FF"/>
           </a:solidFill>
           <a:ln/>
         </p:spPr>
@@ -3073,7 +3073,7 @@
             <a:r>
               <a:rPr lang="en-US" sz="1800" b="1" dirty="0">
                 <a:solidFill>
-                  <a:srgbClr val="0B0F14"/>
+                  <a:srgbClr val="101010"/>
                 </a:solidFill>
                 <a:latin typeface="Arial" pitchFamily="34" charset="0"/>
                 <a:ea typeface="Arial" pitchFamily="34" charset="-122"/>
@@ -3112,7 +3112,7 @@
             <a:r>
               <a:rPr lang="en-US" sz="2000" b="1" dirty="0">
                 <a:solidFill>
-                  <a:srgbClr val="EEF3EE"/>
+                  <a:srgbClr val="F5F5F7"/>
                 </a:solidFill>
                 <a:latin typeface="Arial" pitchFamily="34" charset="0"/>
                 <a:ea typeface="Arial" pitchFamily="34" charset="-122"/>
@@ -3151,7 +3151,7 @@
             <a:r>
               <a:rPr lang="en-US" sz="1700" dirty="0">
                 <a:solidFill>
-                  <a:srgbClr val="9DB0A4"/>
+                  <a:srgbClr val="B4B4B8"/>
                 </a:solidFill>
                 <a:latin typeface="Calibri" pitchFamily="34" charset="0"/>
                 <a:ea typeface="Calibri" pitchFamily="34" charset="-122"/>
@@ -3180,11 +3180,11 @@
             </a:avLst>
           </a:prstGeom>
           <a:solidFill>
-            <a:srgbClr val="152017"/>
+            <a:srgbClr val="1C1C20"/>
           </a:solidFill>
           <a:ln w="12700">
             <a:solidFill>
-              <a:srgbClr val="2C4636"/>
+              <a:srgbClr val="34343A"/>
             </a:solidFill>
             <a:prstDash val="solid"/>
           </a:ln>
@@ -3212,7 +3212,7 @@
             <a:avLst/>
           </a:prstGeom>
           <a:solidFill>
-            <a:srgbClr val="27C08A"/>
+            <a:srgbClr val="6FA8FF"/>
           </a:solidFill>
           <a:ln/>
         </p:spPr>
@@ -3244,7 +3244,7 @@
             <a:r>
               <a:rPr lang="en-US" sz="1800" b="1" dirty="0">
                 <a:solidFill>
-                  <a:srgbClr val="0B0F14"/>
+                  <a:srgbClr val="101010"/>
                 </a:solidFill>
                 <a:latin typeface="Arial" pitchFamily="34" charset="0"/>
                 <a:ea typeface="Arial" pitchFamily="34" charset="-122"/>
@@ -3283,7 +3283,7 @@
             <a:r>
               <a:rPr lang="en-US" sz="2000" b="1" dirty="0">
                 <a:solidFill>
-                  <a:srgbClr val="EEF3EE"/>
+                  <a:srgbClr val="F5F5F7"/>
                 </a:solidFill>
                 <a:latin typeface="Arial" pitchFamily="34" charset="0"/>
                 <a:ea typeface="Arial" pitchFamily="34" charset="-122"/>
@@ -3322,7 +3322,7 @@
             <a:r>
               <a:rPr lang="en-US" sz="1700" dirty="0">
                 <a:solidFill>
-                  <a:srgbClr val="9DB0A4"/>
+                  <a:srgbClr val="B4B4B8"/>
                 </a:solidFill>
                 <a:latin typeface="Calibri" pitchFamily="34" charset="0"/>
                 <a:ea typeface="Calibri" pitchFamily="34" charset="-122"/>
@@ -3359,17 +3359,17 @@
               <a:buNone/>
             </a:pPr>
             <a:r>
-              <a:rPr lang="en-US" sz="1600" dirty="0">
-                <a:solidFill>
-                  <a:srgbClr val="9DB0A4"/>
+              <a:rPr lang="en-US" sz="1500" dirty="0">
+                <a:solidFill>
+                  <a:srgbClr val="B4B4B8"/>
                 </a:solidFill>
                 <a:latin typeface="Calibri" pitchFamily="34" charset="0"/>
                 <a:ea typeface="Calibri" pitchFamily="34" charset="-122"/>
                 <a:cs typeface="Calibri" pitchFamily="34" charset="-120"/>
               </a:rPr>
-              <a:t>No install, no account. Tap EN for English.</a:t>
-            </a:r>
-            <a:endParaRPr lang="en-US" sz="1600" dirty="0"/>
+              <a:t>No install, no account. Tap EN for English, or “Paste and check” a copied message.</a:t>
+            </a:r>
+            <a:endParaRPr lang="en-US" sz="1500" dirty="0"/>
           </a:p>
         </p:txBody>
       </p:sp>
@@ -3387,7 +3387,7 @@
     <p:bg>
       <p:bgPr>
         <a:solidFill>
-          <a:srgbClr val="0B0F14"/>
+          <a:srgbClr val="101010"/>
         </a:solidFill>
       </p:bgPr>
     </p:bg>
@@ -3420,7 +3420,7 @@
             <a:avLst/>
           </a:prstGeom>
           <a:solidFill>
-            <a:srgbClr val="FF9E3D"/>
+            <a:srgbClr val="FF9933"/>
           </a:solidFill>
           <a:ln/>
         </p:spPr>
@@ -3440,7 +3440,7 @@
             <a:avLst/>
           </a:prstGeom>
           <a:solidFill>
-            <a:srgbClr val="EEF3EE"/>
+            <a:srgbClr val="FFFFFF"/>
           </a:solidFill>
           <a:ln/>
         </p:spPr>
@@ -3460,7 +3460,7 @@
             <a:avLst/>
           </a:prstGeom>
           <a:solidFill>
-            <a:srgbClr val="27C08A"/>
+            <a:srgbClr val="138808"/>
           </a:solidFill>
           <a:ln/>
         </p:spPr>
@@ -3480,7 +3480,7 @@
             <a:avLst/>
           </a:prstGeom>
           <a:solidFill>
-            <a:srgbClr val="27C08A"/>
+            <a:srgbClr val="6FA8FF"/>
           </a:solidFill>
           <a:ln/>
         </p:spPr>
@@ -3512,7 +3512,7 @@
             <a:r>
               <a:rPr lang="en-US" sz="1500" b="1" spc="200" kern="0" dirty="0">
                 <a:solidFill>
-                  <a:srgbClr val="27C08A"/>
+                  <a:srgbClr val="6FA8FF"/>
                 </a:solidFill>
                 <a:latin typeface="Arial" pitchFamily="34" charset="0"/>
                 <a:ea typeface="Arial" pitchFamily="34" charset="-122"/>
@@ -3551,7 +3551,7 @@
             <a:r>
               <a:rPr lang="en-US" sz="3200" b="1" dirty="0">
                 <a:solidFill>
-                  <a:srgbClr val="EEF3EE"/>
+                  <a:srgbClr val="F5F5F7"/>
                 </a:solidFill>
                 <a:latin typeface="Arial" pitchFamily="34" charset="0"/>
                 <a:ea typeface="Arial" pitchFamily="34" charset="-122"/>
@@ -3580,11 +3580,11 @@
             </a:avLst>
           </a:prstGeom>
           <a:solidFill>
-            <a:srgbClr val="152017"/>
+            <a:srgbClr val="1C1C20"/>
           </a:solidFill>
           <a:ln w="12700">
             <a:solidFill>
-              <a:srgbClr val="2C4636"/>
+              <a:srgbClr val="34343A"/>
             </a:solidFill>
             <a:prstDash val="solid"/>
           </a:ln>
@@ -3612,7 +3612,7 @@
             <a:avLst/>
           </a:prstGeom>
           <a:solidFill>
-            <a:srgbClr val="27C08A"/>
+            <a:srgbClr val="6FA8FF"/>
           </a:solidFill>
           <a:ln/>
         </p:spPr>
@@ -3644,7 +3644,7 @@
             <a:r>
               <a:rPr lang="en-US" sz="1800" b="1" dirty="0">
                 <a:solidFill>
-                  <a:srgbClr val="0B0F14"/>
+                  <a:srgbClr val="101010"/>
                 </a:solidFill>
                 <a:latin typeface="Arial" pitchFamily="34" charset="0"/>
                 <a:ea typeface="Arial" pitchFamily="34" charset="-122"/>
@@ -3683,7 +3683,7 @@
             <a:r>
               <a:rPr lang="en-US" sz="1800" b="1" dirty="0">
                 <a:solidFill>
-                  <a:srgbClr val="EEF3EE"/>
+                  <a:srgbClr val="F5F5F7"/>
                 </a:solidFill>
                 <a:latin typeface="Arial" pitchFamily="34" charset="0"/>
                 <a:ea typeface="Arial" pitchFamily="34" charset="-122"/>
@@ -3722,7 +3722,7 @@
             <a:r>
               <a:rPr lang="en-US" sz="1500" dirty="0">
                 <a:solidFill>
-                  <a:srgbClr val="9DB0A4"/>
+                  <a:srgbClr val="B4B4B8"/>
                 </a:solidFill>
                 <a:latin typeface="Calibri" pitchFamily="34" charset="0"/>
                 <a:ea typeface="Calibri" pitchFamily="34" charset="-122"/>
@@ -3751,11 +3751,11 @@
             </a:avLst>
           </a:prstGeom>
           <a:solidFill>
-            <a:srgbClr val="152017"/>
+            <a:srgbClr val="1C1C20"/>
           </a:solidFill>
           <a:ln w="12700">
             <a:solidFill>
-              <a:srgbClr val="2C4636"/>
+              <a:srgbClr val="34343A"/>
             </a:solidFill>
             <a:prstDash val="solid"/>
           </a:ln>
@@ -3783,7 +3783,7 @@
             <a:avLst/>
           </a:prstGeom>
           <a:solidFill>
-            <a:srgbClr val="27C08A"/>
+            <a:srgbClr val="6FA8FF"/>
           </a:solidFill>
           <a:ln/>
         </p:spPr>
@@ -3815,7 +3815,7 @@
             <a:r>
               <a:rPr lang="en-US" sz="1800" b="1" dirty="0">
                 <a:solidFill>
-                  <a:srgbClr val="0B0F14"/>
+                  <a:srgbClr val="101010"/>
                 </a:solidFill>
                 <a:latin typeface="Arial" pitchFamily="34" charset="0"/>
                 <a:ea typeface="Arial" pitchFamily="34" charset="-122"/>
@@ -3854,7 +3854,7 @@
             <a:r>
               <a:rPr lang="en-US" sz="1800" b="1" dirty="0">
                 <a:solidFill>
-                  <a:srgbClr val="EEF3EE"/>
+                  <a:srgbClr val="F5F5F7"/>
                 </a:solidFill>
                 <a:latin typeface="Arial" pitchFamily="34" charset="0"/>
                 <a:ea typeface="Arial" pitchFamily="34" charset="-122"/>
@@ -3893,7 +3893,7 @@
             <a:r>
               <a:rPr lang="en-US" sz="1500" dirty="0">
                 <a:solidFill>
-                  <a:srgbClr val="9DB0A4"/>
+                  <a:srgbClr val="B4B4B8"/>
                 </a:solidFill>
                 <a:latin typeface="Calibri" pitchFamily="34" charset="0"/>
                 <a:ea typeface="Calibri" pitchFamily="34" charset="-122"/>
@@ -3922,11 +3922,11 @@
             </a:avLst>
           </a:prstGeom>
           <a:solidFill>
-            <a:srgbClr val="152017"/>
+            <a:srgbClr val="1C1C20"/>
           </a:solidFill>
           <a:ln w="12700">
             <a:solidFill>
-              <a:srgbClr val="2C4636"/>
+              <a:srgbClr val="34343A"/>
             </a:solidFill>
             <a:prstDash val="solid"/>
           </a:ln>
@@ -3954,7 +3954,7 @@
             <a:avLst/>
           </a:prstGeom>
           <a:solidFill>
-            <a:srgbClr val="27C08A"/>
+            <a:srgbClr val="6FA8FF"/>
           </a:solidFill>
           <a:ln/>
         </p:spPr>
@@ -3986,7 +3986,7 @@
             <a:r>
               <a:rPr lang="en-US" sz="1800" b="1" dirty="0">
                 <a:solidFill>
-                  <a:srgbClr val="0B0F14"/>
+                  <a:srgbClr val="101010"/>
                 </a:solidFill>
                 <a:latin typeface="Arial" pitchFamily="34" charset="0"/>
                 <a:ea typeface="Arial" pitchFamily="34" charset="-122"/>
@@ -4025,7 +4025,7 @@
             <a:r>
               <a:rPr lang="en-US" sz="1800" b="1" dirty="0">
                 <a:solidFill>
-                  <a:srgbClr val="EEF3EE"/>
+                  <a:srgbClr val="F5F5F7"/>
                 </a:solidFill>
                 <a:latin typeface="Arial" pitchFamily="34" charset="0"/>
                 <a:ea typeface="Arial" pitchFamily="34" charset="-122"/>
@@ -4064,7 +4064,7 @@
             <a:r>
               <a:rPr lang="en-US" sz="1500" dirty="0">
                 <a:solidFill>
-                  <a:srgbClr val="9DB0A4"/>
+                  <a:srgbClr val="B4B4B8"/>
                 </a:solidFill>
                 <a:latin typeface="Calibri" pitchFamily="34" charset="0"/>
                 <a:ea typeface="Calibri" pitchFamily="34" charset="-122"/>
@@ -4093,11 +4093,11 @@
             </a:avLst>
           </a:prstGeom>
           <a:solidFill>
-            <a:srgbClr val="152017"/>
+            <a:srgbClr val="1C1C20"/>
           </a:solidFill>
           <a:ln w="12700">
             <a:solidFill>
-              <a:srgbClr val="2C4636"/>
+              <a:srgbClr val="34343A"/>
             </a:solidFill>
             <a:prstDash val="solid"/>
           </a:ln>
@@ -4125,7 +4125,7 @@
             <a:avLst/>
           </a:prstGeom>
           <a:solidFill>
-            <a:srgbClr val="27C08A"/>
+            <a:srgbClr val="6FA8FF"/>
           </a:solidFill>
           <a:ln/>
         </p:spPr>
@@ -4157,7 +4157,7 @@
             <a:r>
               <a:rPr lang="en-US" sz="1800" b="1" dirty="0">
                 <a:solidFill>
-                  <a:srgbClr val="0B0F14"/>
+                  <a:srgbClr val="101010"/>
                 </a:solidFill>
                 <a:latin typeface="Arial" pitchFamily="34" charset="0"/>
                 <a:ea typeface="Arial" pitchFamily="34" charset="-122"/>
@@ -4196,7 +4196,7 @@
             <a:r>
               <a:rPr lang="en-US" sz="1800" b="1" dirty="0">
                 <a:solidFill>
-                  <a:srgbClr val="EEF3EE"/>
+                  <a:srgbClr val="F5F5F7"/>
                 </a:solidFill>
                 <a:latin typeface="Arial" pitchFamily="34" charset="0"/>
                 <a:ea typeface="Arial" pitchFamily="34" charset="-122"/>
@@ -4235,7 +4235,7 @@
             <a:r>
               <a:rPr lang="en-US" sz="1500" dirty="0">
                 <a:solidFill>
-                  <a:srgbClr val="9DB0A4"/>
+                  <a:srgbClr val="B4B4B8"/>
                 </a:solidFill>
                 <a:latin typeface="Calibri" pitchFamily="34" charset="0"/>
                 <a:ea typeface="Calibri" pitchFamily="34" charset="-122"/>
@@ -4264,11 +4264,11 @@
             </a:avLst>
           </a:prstGeom>
           <a:solidFill>
-            <a:srgbClr val="1B2A20"/>
+            <a:srgbClr val="26262B"/>
           </a:solidFill>
           <a:ln w="12700">
             <a:solidFill>
-              <a:srgbClr val="2C4636"/>
+              <a:srgbClr val="34343A"/>
             </a:solidFill>
             <a:prstDash val="solid"/>
           </a:ln>
@@ -4308,7 +4308,7 @@
             <a:r>
               <a:rPr lang="en-US" sz="1300" b="1" spc="100" kern="0" dirty="0">
                 <a:solidFill>
-                  <a:srgbClr val="FF9E3D"/>
+                  <a:srgbClr val="E2C28A"/>
                 </a:solidFill>
                 <a:latin typeface="Arial" pitchFamily="34" charset="0"/>
                 <a:ea typeface="Arial" pitchFamily="34" charset="-122"/>
@@ -4347,7 +4347,7 @@
             <a:r>
               <a:rPr lang="en-US" sz="1600" dirty="0">
                 <a:solidFill>
-                  <a:srgbClr val="EEF3EE"/>
+                  <a:srgbClr val="F5F5F7"/>
                 </a:solidFill>
                 <a:latin typeface="Calibri" pitchFamily="34" charset="0"/>
                 <a:ea typeface="Calibri" pitchFamily="34" charset="-122"/>
@@ -4386,7 +4386,7 @@
             <a:r>
               <a:rPr lang="en-US" sz="1300" b="1" spc="100" kern="0" dirty="0">
                 <a:solidFill>
-                  <a:srgbClr val="4FE3B0"/>
+                  <a:srgbClr val="4FD68A"/>
                 </a:solidFill>
                 <a:latin typeface="Arial" pitchFamily="34" charset="0"/>
                 <a:ea typeface="Arial" pitchFamily="34" charset="-122"/>
@@ -4468,7 +4468,7 @@
                       <a:r>
                         <a:rPr lang="en-US" sz="1300" b="1" dirty="0">
                           <a:solidFill>
-                            <a:srgbClr val="6E8579"/>
+                            <a:srgbClr val="7E7E84"/>
                           </a:solidFill>
                           <a:latin typeface="Calibri" pitchFamily="34" charset="0"/>
                           <a:ea typeface="Calibri" pitchFamily="34" charset="-122"/>
@@ -4509,7 +4509,7 @@
                       <a:r>
                         <a:rPr lang="en-US" sz="1300" b="1" dirty="0">
                           <a:solidFill>
-                            <a:srgbClr val="6E8579"/>
+                            <a:srgbClr val="7E7E84"/>
                           </a:solidFill>
                           <a:latin typeface="Calibri" pitchFamily="34" charset="0"/>
                           <a:ea typeface="Calibri" pitchFamily="34" charset="-122"/>
@@ -4550,7 +4550,7 @@
                       <a:r>
                         <a:rPr lang="en-US" sz="1300" b="1" dirty="0">
                           <a:solidFill>
-                            <a:srgbClr val="6E8579"/>
+                            <a:srgbClr val="7E7E84"/>
                           </a:solidFill>
                           <a:latin typeface="Calibri" pitchFamily="34" charset="0"/>
                           <a:ea typeface="Calibri" pitchFamily="34" charset="-122"/>
@@ -4593,7 +4593,7 @@
                       <a:r>
                         <a:rPr lang="en-US" sz="1500" dirty="0">
                           <a:solidFill>
-                            <a:srgbClr val="9DB0A4"/>
+                            <a:srgbClr val="B4B4B8"/>
                           </a:solidFill>
                           <a:latin typeface="Calibri" pitchFamily="34" charset="0"/>
                           <a:ea typeface="Calibri" pitchFamily="34" charset="-122"/>
@@ -4634,7 +4634,7 @@
                       <a:r>
                         <a:rPr lang="en-US" sz="1500" dirty="0">
                           <a:solidFill>
-                            <a:srgbClr val="EEF3EE"/>
+                            <a:srgbClr val="F5F5F7"/>
                           </a:solidFill>
                           <a:latin typeface="Calibri" pitchFamily="34" charset="0"/>
                           <a:ea typeface="Calibri" pitchFamily="34" charset="-122"/>
@@ -4675,7 +4675,7 @@
                       <a:r>
                         <a:rPr lang="en-US" sz="1500" b="1" dirty="0">
                           <a:solidFill>
-                            <a:srgbClr val="FF9E3D"/>
+                            <a:srgbClr val="E2C28A"/>
                           </a:solidFill>
                           <a:latin typeface="Calibri" pitchFamily="34" charset="0"/>
                           <a:ea typeface="Calibri" pitchFamily="34" charset="-122"/>
@@ -4716,7 +4716,7 @@
                       <a:r>
                         <a:rPr lang="en-US" sz="1500" dirty="0">
                           <a:solidFill>
-                            <a:srgbClr val="EEF3EE"/>
+                            <a:srgbClr val="F5F5F7"/>
                           </a:solidFill>
                           <a:latin typeface="Calibri" pitchFamily="34" charset="0"/>
                           <a:ea typeface="Calibri" pitchFamily="34" charset="-122"/>
@@ -4759,7 +4759,7 @@
                       <a:r>
                         <a:rPr lang="en-US" sz="1500" b="1" dirty="0">
                           <a:solidFill>
-                            <a:srgbClr val="27C08A"/>
+                            <a:srgbClr val="6FA8FF"/>
                           </a:solidFill>
                           <a:latin typeface="Calibri" pitchFamily="34" charset="0"/>
                           <a:ea typeface="Calibri" pitchFamily="34" charset="-122"/>
@@ -4800,7 +4800,7 @@
                       <a:r>
                         <a:rPr lang="en-US" sz="1500" dirty="0">
                           <a:solidFill>
-                            <a:srgbClr val="EEF3EE"/>
+                            <a:srgbClr val="F5F5F7"/>
                           </a:solidFill>
                           <a:latin typeface="Calibri" pitchFamily="34" charset="0"/>
                           <a:ea typeface="Calibri" pitchFamily="34" charset="-122"/>
@@ -4841,7 +4841,7 @@
                       <a:r>
                         <a:rPr lang="en-US" sz="1500" b="1" dirty="0">
                           <a:solidFill>
-                            <a:srgbClr val="27C08A"/>
+                            <a:srgbClr val="6FA8FF"/>
                           </a:solidFill>
                           <a:latin typeface="Calibri" pitchFamily="34" charset="0"/>
                           <a:ea typeface="Calibri" pitchFamily="34" charset="-122"/>
@@ -4882,7 +4882,7 @@
                       <a:r>
                         <a:rPr lang="en-US" sz="1500" dirty="0">
                           <a:solidFill>
-                            <a:srgbClr val="EEF3EE"/>
+                            <a:srgbClr val="F5F5F7"/>
                           </a:solidFill>
                           <a:latin typeface="Calibri" pitchFamily="34" charset="0"/>
                           <a:ea typeface="Calibri" pitchFamily="34" charset="-122"/>
@@ -4944,7 +4944,7 @@
             <a:r>
               <a:rPr lang="en-US" sz="1300" dirty="0">
                 <a:solidFill>
-                  <a:srgbClr val="6E8579"/>
+                  <a:srgbClr val="7E7E84"/>
                 </a:solidFill>
                 <a:latin typeface="Calibri" pitchFamily="34" charset="0"/>
                 <a:ea typeface="Calibri" pitchFamily="34" charset="-122"/>
@@ -4983,7 +4983,7 @@
             <a:r>
               <a:rPr lang="en-US" sz="1300" b="1" spc="100" kern="0" dirty="0">
                 <a:solidFill>
-                  <a:srgbClr val="27C08A"/>
+                  <a:srgbClr val="6FA8FF"/>
                 </a:solidFill>
                 <a:latin typeface="Arial" pitchFamily="34" charset="0"/>
                 <a:ea typeface="Arial" pitchFamily="34" charset="-122"/>
@@ -5022,7 +5022,7 @@
             <a:r>
               <a:rPr lang="en-US" sz="1500" dirty="0">
                 <a:solidFill>
-                  <a:srgbClr val="EEF3EE"/>
+                  <a:srgbClr val="F5F5F7"/>
                 </a:solidFill>
                 <a:latin typeface="Calibri" pitchFamily="34" charset="0"/>
                 <a:ea typeface="Calibri" pitchFamily="34" charset="-122"/>
@@ -5061,7 +5061,7 @@
             <a:r>
               <a:rPr lang="en-US" sz="1200" dirty="0">
                 <a:solidFill>
-                  <a:srgbClr val="6E8579"/>
+                  <a:srgbClr val="7E7E84"/>
                 </a:solidFill>
                 <a:latin typeface="Calibri" pitchFamily="34" charset="0"/>
                 <a:ea typeface="Calibri" pitchFamily="34" charset="-122"/>
@@ -5087,7 +5087,7 @@
     <p:bg>
       <p:bgPr>
         <a:solidFill>
-          <a:srgbClr val="0B0F14"/>
+          <a:srgbClr val="101010"/>
         </a:solidFill>
       </p:bgPr>
     </p:bg>
@@ -5120,7 +5120,7 @@
             <a:avLst/>
           </a:prstGeom>
           <a:solidFill>
-            <a:srgbClr val="FF9E3D"/>
+            <a:srgbClr val="FF9933"/>
           </a:solidFill>
           <a:ln/>
         </p:spPr>
@@ -5140,7 +5140,7 @@
             <a:avLst/>
           </a:prstGeom>
           <a:solidFill>
-            <a:srgbClr val="EEF3EE"/>
+            <a:srgbClr val="FFFFFF"/>
           </a:solidFill>
           <a:ln/>
         </p:spPr>
@@ -5160,7 +5160,7 @@
             <a:avLst/>
           </a:prstGeom>
           <a:solidFill>
-            <a:srgbClr val="27C08A"/>
+            <a:srgbClr val="138808"/>
           </a:solidFill>
           <a:ln/>
         </p:spPr>
@@ -5180,7 +5180,7 @@
             <a:avLst/>
           </a:prstGeom>
           <a:solidFill>
-            <a:srgbClr val="27C08A"/>
+            <a:srgbClr val="6FA8FF"/>
           </a:solidFill>
           <a:ln/>
         </p:spPr>
@@ -5212,7 +5212,7 @@
             <a:r>
               <a:rPr lang="en-US" sz="1500" b="1" spc="200" kern="0" dirty="0">
                 <a:solidFill>
-                  <a:srgbClr val="27C08A"/>
+                  <a:srgbClr val="6FA8FF"/>
                 </a:solidFill>
                 <a:latin typeface="Arial" pitchFamily="34" charset="0"/>
                 <a:ea typeface="Arial" pitchFamily="34" charset="-122"/>
@@ -5251,7 +5251,7 @@
             <a:r>
               <a:rPr lang="en-US" sz="3200" b="1" dirty="0">
                 <a:solidFill>
-                  <a:srgbClr val="EEF3EE"/>
+                  <a:srgbClr val="F5F5F7"/>
                 </a:solidFill>
                 <a:latin typeface="Arial" pitchFamily="34" charset="0"/>
                 <a:ea typeface="Arial" pitchFamily="34" charset="-122"/>
@@ -5280,11 +5280,11 @@
             </a:avLst>
           </a:prstGeom>
           <a:solidFill>
-            <a:srgbClr val="152017"/>
+            <a:srgbClr val="1C1C20"/>
           </a:solidFill>
           <a:ln w="19050">
             <a:solidFill>
-              <a:srgbClr val="FF9E3D"/>
+              <a:srgbClr val="E2C28A"/>
             </a:solidFill>
             <a:prstDash val="solid"/>
           </a:ln>
@@ -5324,7 +5324,7 @@
             <a:r>
               <a:rPr lang="en-US" sz="1300" b="1" spc="100" kern="0" dirty="0">
                 <a:solidFill>
-                  <a:srgbClr val="FF9E3D"/>
+                  <a:srgbClr val="E2C28A"/>
                 </a:solidFill>
                 <a:latin typeface="Arial" pitchFamily="34" charset="0"/>
                 <a:ea typeface="Arial" pitchFamily="34" charset="-122"/>
@@ -5363,7 +5363,7 @@
             <a:r>
               <a:rPr lang="en-US" sz="4400" b="1" dirty="0">
                 <a:solidFill>
-                  <a:srgbClr val="27C08A"/>
+                  <a:srgbClr val="6FA8FF"/>
                 </a:solidFill>
                 <a:latin typeface="Arial" pitchFamily="34" charset="0"/>
                 <a:ea typeface="Arial" pitchFamily="34" charset="-122"/>
@@ -5377,7 +5377,7 @@
             <a:r>
               <a:rPr lang="en-US" sz="2200" b="1" dirty="0">
                 <a:solidFill>
-                  <a:srgbClr val="27C08A"/>
+                  <a:srgbClr val="6FA8FF"/>
                 </a:solidFill>
                 <a:latin typeface="Arial" pitchFamily="34" charset="0"/>
                 <a:ea typeface="Arial" pitchFamily="34" charset="-122"/>
@@ -5416,7 +5416,7 @@
             <a:r>
               <a:rPr lang="en-US" sz="1700" b="1" dirty="0">
                 <a:solidFill>
-                  <a:srgbClr val="EEF3EE"/>
+                  <a:srgbClr val="F5F5F7"/>
                 </a:solidFill>
                 <a:latin typeface="Calibri" pitchFamily="34" charset="0"/>
                 <a:ea typeface="Calibri" pitchFamily="34" charset="-122"/>
@@ -5455,7 +5455,7 @@
             <a:r>
               <a:rPr lang="en-US" sz="4400" b="1" dirty="0">
                 <a:solidFill>
-                  <a:srgbClr val="FF9E3D"/>
+                  <a:srgbClr val="E2C28A"/>
                 </a:solidFill>
                 <a:latin typeface="Arial" pitchFamily="34" charset="0"/>
                 <a:ea typeface="Arial" pitchFamily="34" charset="-122"/>
@@ -5469,7 +5469,7 @@
             <a:r>
               <a:rPr lang="en-US" sz="2200" b="1" dirty="0">
                 <a:solidFill>
-                  <a:srgbClr val="FF9E3D"/>
+                  <a:srgbClr val="E2C28A"/>
                 </a:solidFill>
                 <a:latin typeface="Arial" pitchFamily="34" charset="0"/>
                 <a:ea typeface="Arial" pitchFamily="34" charset="-122"/>
@@ -5508,7 +5508,7 @@
             <a:r>
               <a:rPr lang="en-US" sz="1700" b="1" dirty="0">
                 <a:solidFill>
-                  <a:srgbClr val="EEF3EE"/>
+                  <a:srgbClr val="F5F5F7"/>
                 </a:solidFill>
                 <a:latin typeface="Calibri" pitchFamily="34" charset="0"/>
                 <a:ea typeface="Calibri" pitchFamily="34" charset="-122"/>
@@ -5550,7 +5550,7 @@
             <a:r>
               <a:rPr lang="en-US" sz="1300" dirty="0">
                 <a:solidFill>
-                  <a:srgbClr val="9DB0A4"/>
+                  <a:srgbClr val="B4B4B8"/>
                 </a:solidFill>
                 <a:latin typeface="Calibri" pitchFamily="34" charset="0"/>
                 <a:ea typeface="Calibri" pitchFamily="34" charset="-122"/>
@@ -5570,7 +5570,7 @@
             <a:r>
               <a:rPr lang="en-US" sz="1300" dirty="0">
                 <a:solidFill>
-                  <a:srgbClr val="9DB0A4"/>
+                  <a:srgbClr val="B4B4B8"/>
                 </a:solidFill>
                 <a:latin typeface="Calibri" pitchFamily="34" charset="0"/>
                 <a:ea typeface="Calibri" pitchFamily="34" charset="-122"/>
@@ -5590,7 +5590,7 @@
             <a:r>
               <a:rPr lang="en-US" sz="1300" dirty="0">
                 <a:solidFill>
-                  <a:srgbClr val="EEF3EE"/>
+                  <a:srgbClr val="F5F5F7"/>
                 </a:solidFill>
                 <a:latin typeface="Calibri" pitchFamily="34" charset="0"/>
                 <a:ea typeface="Calibri" pitchFamily="34" charset="-122"/>
@@ -5619,11 +5619,11 @@
             </a:avLst>
           </a:prstGeom>
           <a:solidFill>
-            <a:srgbClr val="152017"/>
+            <a:srgbClr val="1C1C20"/>
           </a:solidFill>
           <a:ln w="12700">
             <a:solidFill>
-              <a:srgbClr val="2C4636"/>
+              <a:srgbClr val="34343A"/>
             </a:solidFill>
             <a:prstDash val="solid"/>
           </a:ln>
@@ -5663,7 +5663,7 @@
             <a:r>
               <a:rPr lang="en-US" sz="1250" b="1" spc="50" kern="0" dirty="0">
                 <a:solidFill>
-                  <a:srgbClr val="4FE3B0"/>
+                  <a:srgbClr val="4FD68A"/>
                 </a:solidFill>
                 <a:latin typeface="Arial" pitchFamily="34" charset="0"/>
                 <a:ea typeface="Arial" pitchFamily="34" charset="-122"/>
@@ -5702,7 +5702,7 @@
             <a:r>
               <a:rPr lang="en-US" sz="3600" b="1" dirty="0">
                 <a:solidFill>
-                  <a:srgbClr val="4FE3B0"/>
+                  <a:srgbClr val="4FD68A"/>
                 </a:solidFill>
                 <a:latin typeface="Arial" pitchFamily="34" charset="0"/>
                 <a:ea typeface="Arial" pitchFamily="34" charset="-122"/>
@@ -5716,7 +5716,7 @@
             <a:r>
               <a:rPr lang="en-US" sz="1800" b="1" dirty="0">
                 <a:solidFill>
-                  <a:srgbClr val="4FE3B0"/>
+                  <a:srgbClr val="4FD68A"/>
                 </a:solidFill>
                 <a:latin typeface="Arial" pitchFamily="34" charset="0"/>
                 <a:ea typeface="Arial" pitchFamily="34" charset="-122"/>
@@ -5755,7 +5755,7 @@
             <a:r>
               <a:rPr lang="en-US" sz="1600" b="1" dirty="0">
                 <a:solidFill>
-                  <a:srgbClr val="EEF3EE"/>
+                  <a:srgbClr val="F5F5F7"/>
                 </a:solidFill>
                 <a:latin typeface="Calibri" pitchFamily="34" charset="0"/>
                 <a:ea typeface="Calibri" pitchFamily="34" charset="-122"/>
@@ -5794,7 +5794,7 @@
             <a:r>
               <a:rPr lang="en-US" sz="1400" dirty="0">
                 <a:solidFill>
-                  <a:srgbClr val="9DB0A4"/>
+                  <a:srgbClr val="B4B4B8"/>
                 </a:solidFill>
                 <a:latin typeface="Calibri" pitchFamily="34" charset="0"/>
                 <a:ea typeface="Calibri" pitchFamily="34" charset="-122"/>
@@ -5823,11 +5823,11 @@
             </a:avLst>
           </a:prstGeom>
           <a:solidFill>
-            <a:srgbClr val="152017"/>
+            <a:srgbClr val="1C1C20"/>
           </a:solidFill>
           <a:ln w="12700">
             <a:solidFill>
-              <a:srgbClr val="2C4636"/>
+              <a:srgbClr val="34343A"/>
             </a:solidFill>
             <a:prstDash val="solid"/>
           </a:ln>
@@ -5867,7 +5867,7 @@
             <a:r>
               <a:rPr lang="en-US" sz="1250" b="1" spc="50" kern="0" dirty="0">
                 <a:solidFill>
-                  <a:srgbClr val="27C08A"/>
+                  <a:srgbClr val="6FA8FF"/>
                 </a:solidFill>
                 <a:latin typeface="Arial" pitchFamily="34" charset="0"/>
                 <a:ea typeface="Arial" pitchFamily="34" charset="-122"/>
@@ -5906,7 +5906,7 @@
             <a:r>
               <a:rPr lang="en-US" sz="3600" b="1" dirty="0">
                 <a:solidFill>
-                  <a:srgbClr val="27C08A"/>
+                  <a:srgbClr val="6FA8FF"/>
                 </a:solidFill>
                 <a:latin typeface="Arial" pitchFamily="34" charset="0"/>
                 <a:ea typeface="Arial" pitchFamily="34" charset="-122"/>
@@ -5920,7 +5920,7 @@
             <a:r>
               <a:rPr lang="en-US" sz="1800" b="1" dirty="0">
                 <a:solidFill>
-                  <a:srgbClr val="27C08A"/>
+                  <a:srgbClr val="6FA8FF"/>
                 </a:solidFill>
                 <a:latin typeface="Arial" pitchFamily="34" charset="0"/>
                 <a:ea typeface="Arial" pitchFamily="34" charset="-122"/>
@@ -5959,7 +5959,7 @@
             <a:r>
               <a:rPr lang="en-US" sz="1600" b="1" dirty="0">
                 <a:solidFill>
-                  <a:srgbClr val="EEF3EE"/>
+                  <a:srgbClr val="F5F5F7"/>
                 </a:solidFill>
                 <a:latin typeface="Calibri" pitchFamily="34" charset="0"/>
                 <a:ea typeface="Calibri" pitchFamily="34" charset="-122"/>
@@ -5998,7 +5998,7 @@
             <a:r>
               <a:rPr lang="en-US" sz="1400" dirty="0">
                 <a:solidFill>
-                  <a:srgbClr val="9DB0A4"/>
+                  <a:srgbClr val="B4B4B8"/>
                 </a:solidFill>
                 <a:latin typeface="Calibri" pitchFamily="34" charset="0"/>
                 <a:ea typeface="Calibri" pitchFamily="34" charset="-122"/>
@@ -6027,11 +6027,11 @@
             </a:avLst>
           </a:prstGeom>
           <a:solidFill>
-            <a:srgbClr val="152017"/>
+            <a:srgbClr val="1C1C20"/>
           </a:solidFill>
           <a:ln w="12700">
             <a:solidFill>
-              <a:srgbClr val="2C4636"/>
+              <a:srgbClr val="34343A"/>
             </a:solidFill>
             <a:prstDash val="solid"/>
           </a:ln>
@@ -6071,7 +6071,7 @@
             <a:r>
               <a:rPr lang="en-US" sz="1250" b="1" spc="50" kern="0" dirty="0">
                 <a:solidFill>
-                  <a:srgbClr val="27C08A"/>
+                  <a:srgbClr val="6FA8FF"/>
                 </a:solidFill>
                 <a:latin typeface="Arial" pitchFamily="34" charset="0"/>
                 <a:ea typeface="Arial" pitchFamily="34" charset="-122"/>
@@ -6110,7 +6110,7 @@
             <a:r>
               <a:rPr lang="en-US" sz="3600" b="1" dirty="0">
                 <a:solidFill>
-                  <a:srgbClr val="27C08A"/>
+                  <a:srgbClr val="6FA8FF"/>
                 </a:solidFill>
                 <a:latin typeface="Arial" pitchFamily="34" charset="0"/>
                 <a:ea typeface="Arial" pitchFamily="34" charset="-122"/>
@@ -6124,7 +6124,7 @@
             <a:r>
               <a:rPr lang="en-US" sz="1800" b="1" dirty="0">
                 <a:solidFill>
-                  <a:srgbClr val="27C08A"/>
+                  <a:srgbClr val="6FA8FF"/>
                 </a:solidFill>
                 <a:latin typeface="Arial" pitchFamily="34" charset="0"/>
                 <a:ea typeface="Arial" pitchFamily="34" charset="-122"/>
@@ -6163,7 +6163,7 @@
             <a:r>
               <a:rPr lang="en-US" sz="1600" b="1" dirty="0">
                 <a:solidFill>
-                  <a:srgbClr val="EEF3EE"/>
+                  <a:srgbClr val="F5F5F7"/>
                 </a:solidFill>
                 <a:latin typeface="Calibri" pitchFamily="34" charset="0"/>
                 <a:ea typeface="Calibri" pitchFamily="34" charset="-122"/>
@@ -6202,7 +6202,7 @@
             <a:r>
               <a:rPr lang="en-US" sz="1400" dirty="0">
                 <a:solidFill>
-                  <a:srgbClr val="9DB0A4"/>
+                  <a:srgbClr val="B4B4B8"/>
                 </a:solidFill>
                 <a:latin typeface="Calibri" pitchFamily="34" charset="0"/>
                 <a:ea typeface="Calibri" pitchFamily="34" charset="-122"/>
@@ -6231,11 +6231,11 @@
             </a:avLst>
           </a:prstGeom>
           <a:solidFill>
-            <a:srgbClr val="1B2A20"/>
+            <a:srgbClr val="26262B"/>
           </a:solidFill>
           <a:ln w="19050">
             <a:solidFill>
-              <a:srgbClr val="FF9E3D"/>
+              <a:srgbClr val="E2C28A"/>
             </a:solidFill>
             <a:prstDash val="solid"/>
           </a:ln>
@@ -6275,7 +6275,7 @@
             <a:r>
               <a:rPr lang="en-US" sz="1700" b="1" dirty="0">
                 <a:solidFill>
-                  <a:srgbClr val="FF9E3D"/>
+                  <a:srgbClr val="E2C28A"/>
                 </a:solidFill>
                 <a:latin typeface="Calibri" pitchFamily="34" charset="0"/>
                 <a:ea typeface="Calibri" pitchFamily="34" charset="-122"/>
@@ -6289,7 +6289,7 @@
             <a:r>
               <a:rPr lang="en-US" sz="1700" dirty="0">
                 <a:solidFill>
-                  <a:srgbClr val="EEF3EE"/>
+                  <a:srgbClr val="F5F5F7"/>
                 </a:solidFill>
                 <a:latin typeface="Calibri" pitchFamily="34" charset="0"/>
                 <a:ea typeface="Calibri" pitchFamily="34" charset="-122"/>
@@ -6328,7 +6328,7 @@
             <a:r>
               <a:rPr lang="en-US" sz="1200" dirty="0">
                 <a:solidFill>
-                  <a:srgbClr val="6E8579"/>
+                  <a:srgbClr val="7E7E84"/>
                 </a:solidFill>
                 <a:latin typeface="Calibri" pitchFamily="34" charset="0"/>
                 <a:ea typeface="Calibri" pitchFamily="34" charset="-122"/>
@@ -6354,7 +6354,7 @@
     <p:bg>
       <p:bgPr>
         <a:solidFill>
-          <a:srgbClr val="0B0F14"/>
+          <a:srgbClr val="101010"/>
         </a:solidFill>
       </p:bgPr>
     </p:bg>
@@ -6387,7 +6387,7 @@
             <a:avLst/>
           </a:prstGeom>
           <a:solidFill>
-            <a:srgbClr val="FF9E3D"/>
+            <a:srgbClr val="FF9933"/>
           </a:solidFill>
           <a:ln/>
         </p:spPr>
@@ -6407,7 +6407,7 @@
             <a:avLst/>
           </a:prstGeom>
           <a:solidFill>
-            <a:srgbClr val="EEF3EE"/>
+            <a:srgbClr val="FFFFFF"/>
           </a:solidFill>
           <a:ln/>
         </p:spPr>
@@ -6427,7 +6427,7 @@
             <a:avLst/>
           </a:prstGeom>
           <a:solidFill>
-            <a:srgbClr val="27C08A"/>
+            <a:srgbClr val="138808"/>
           </a:solidFill>
           <a:ln/>
         </p:spPr>
@@ -6447,7 +6447,7 @@
             <a:avLst/>
           </a:prstGeom>
           <a:solidFill>
-            <a:srgbClr val="27C08A"/>
+            <a:srgbClr val="6FA8FF"/>
           </a:solidFill>
           <a:ln/>
         </p:spPr>
@@ -6479,7 +6479,7 @@
             <a:r>
               <a:rPr lang="en-US" sz="1500" b="1" spc="200" kern="0" dirty="0">
                 <a:solidFill>
-                  <a:srgbClr val="27C08A"/>
+                  <a:srgbClr val="6FA8FF"/>
                 </a:solidFill>
                 <a:latin typeface="Arial" pitchFamily="34" charset="0"/>
                 <a:ea typeface="Arial" pitchFamily="34" charset="-122"/>
@@ -6518,7 +6518,7 @@
             <a:r>
               <a:rPr lang="en-US" sz="3200" b="1" dirty="0">
                 <a:solidFill>
-                  <a:srgbClr val="EEF3EE"/>
+                  <a:srgbClr val="F5F5F7"/>
                 </a:solidFill>
                 <a:latin typeface="Arial" pitchFamily="34" charset="0"/>
                 <a:ea typeface="Arial" pitchFamily="34" charset="-122"/>
@@ -6547,11 +6547,11 @@
             </a:avLst>
           </a:prstGeom>
           <a:solidFill>
-            <a:srgbClr val="152017"/>
+            <a:srgbClr val="1C1C20"/>
           </a:solidFill>
           <a:ln w="12700">
             <a:solidFill>
-              <a:srgbClr val="2C4636"/>
+              <a:srgbClr val="34343A"/>
             </a:solidFill>
             <a:prstDash val="solid"/>
           </a:ln>
@@ -6591,7 +6591,7 @@
             <a:r>
               <a:rPr lang="en-US" sz="2100" b="1" dirty="0">
                 <a:solidFill>
-                  <a:srgbClr val="27C08A"/>
+                  <a:srgbClr val="6FA8FF"/>
                 </a:solidFill>
                 <a:latin typeface="Arial" pitchFamily="34" charset="0"/>
                 <a:ea typeface="Arial" pitchFamily="34" charset="-122"/>
@@ -6620,11 +6620,11 @@
             </a:avLst>
           </a:prstGeom>
           <a:solidFill>
-            <a:srgbClr val="152017"/>
+            <a:srgbClr val="1C1C20"/>
           </a:solidFill>
           <a:ln w="12700">
             <a:solidFill>
-              <a:srgbClr val="2C4636"/>
+              <a:srgbClr val="34343A"/>
             </a:solidFill>
             <a:prstDash val="solid"/>
           </a:ln>
@@ -6664,7 +6664,7 @@
             <a:r>
               <a:rPr lang="en-US" sz="2100" b="1" dirty="0">
                 <a:solidFill>
-                  <a:srgbClr val="4FE3B0"/>
+                  <a:srgbClr val="4FD68A"/>
                 </a:solidFill>
                 <a:latin typeface="Arial" pitchFamily="34" charset="0"/>
                 <a:ea typeface="Arial" pitchFamily="34" charset="-122"/>
@@ -6693,11 +6693,11 @@
             </a:avLst>
           </a:prstGeom>
           <a:solidFill>
-            <a:srgbClr val="152017"/>
+            <a:srgbClr val="1C1C20"/>
           </a:solidFill>
           <a:ln w="12700">
             <a:solidFill>
-              <a:srgbClr val="2C4636"/>
+              <a:srgbClr val="34343A"/>
             </a:solidFill>
             <a:prstDash val="solid"/>
           </a:ln>
@@ -6737,7 +6737,7 @@
             <a:r>
               <a:rPr lang="en-US" sz="2100" b="1" dirty="0">
                 <a:solidFill>
-                  <a:srgbClr val="FF9E3D"/>
+                  <a:srgbClr val="E2C28A"/>
                 </a:solidFill>
                 <a:latin typeface="Arial" pitchFamily="34" charset="0"/>
                 <a:ea typeface="Arial" pitchFamily="34" charset="-122"/>
@@ -6776,7 +6776,7 @@
             <a:r>
               <a:rPr lang="en-US" sz="3400" b="1" dirty="0">
                 <a:solidFill>
-                  <a:srgbClr val="FF9E3D"/>
+                  <a:srgbClr val="E2C28A"/>
                 </a:solidFill>
                 <a:latin typeface="Arial" pitchFamily="34" charset="0"/>
                 <a:ea typeface="Arial" pitchFamily="34" charset="-122"/>
@@ -6793,7 +6793,7 @@
             <a:r>
               <a:rPr lang="en-US" sz="2000" b="1" dirty="0">
                 <a:solidFill>
-                  <a:srgbClr val="FF9E3D"/>
+                  <a:srgbClr val="E2C28A"/>
                 </a:solidFill>
                 <a:latin typeface="Arial" pitchFamily="34" charset="0"/>
                 <a:ea typeface="Arial" pitchFamily="34" charset="-122"/>
@@ -6832,7 +6832,7 @@
             <a:r>
               <a:rPr lang="en-US" sz="1600" dirty="0">
                 <a:solidFill>
-                  <a:srgbClr val="EEF3EE"/>
+                  <a:srgbClr val="F5F5F7"/>
                 </a:solidFill>
                 <a:latin typeface="Calibri" pitchFamily="34" charset="0"/>
                 <a:ea typeface="Calibri" pitchFamily="34" charset="-122"/>
@@ -6875,7 +6875,7 @@
             <a:r>
               <a:rPr lang="en-US" sz="1500" dirty="0">
                 <a:solidFill>
-                  <a:srgbClr val="9DB0A4"/>
+                  <a:srgbClr val="B4B4B8"/>
                 </a:solidFill>
                 <a:latin typeface="Calibri" pitchFamily="34" charset="0"/>
                 <a:ea typeface="Calibri" pitchFamily="34" charset="-122"/>
@@ -6896,7 +6896,7 @@
             <a:r>
               <a:rPr lang="en-US" sz="1500" dirty="0">
                 <a:solidFill>
-                  <a:srgbClr val="9DB0A4"/>
+                  <a:srgbClr val="B4B4B8"/>
                 </a:solidFill>
                 <a:latin typeface="Calibri" pitchFamily="34" charset="0"/>
                 <a:ea typeface="Calibri" pitchFamily="34" charset="-122"/>
@@ -6935,7 +6935,7 @@
             <a:r>
               <a:rPr lang="en-US" sz="1600" dirty="0">
                 <a:solidFill>
-                  <a:srgbClr val="EEF3EE"/>
+                  <a:srgbClr val="F5F5F7"/>
                 </a:solidFill>
                 <a:latin typeface="Calibri" pitchFamily="34" charset="0"/>
                 <a:ea typeface="Calibri" pitchFamily="34" charset="-122"/>
@@ -6978,7 +6978,7 @@
             <a:r>
               <a:rPr lang="en-US" sz="1500" dirty="0">
                 <a:solidFill>
-                  <a:srgbClr val="9DB0A4"/>
+                  <a:srgbClr val="B4B4B8"/>
                 </a:solidFill>
                 <a:latin typeface="Calibri" pitchFamily="34" charset="0"/>
                 <a:ea typeface="Calibri" pitchFamily="34" charset="-122"/>
@@ -6999,7 +6999,7 @@
             <a:r>
               <a:rPr lang="en-US" sz="1500" dirty="0">
                 <a:solidFill>
-                  <a:srgbClr val="9DB0A4"/>
+                  <a:srgbClr val="B4B4B8"/>
                 </a:solidFill>
                 <a:latin typeface="Calibri" pitchFamily="34" charset="0"/>
                 <a:ea typeface="Calibri" pitchFamily="34" charset="-122"/>
@@ -7020,7 +7020,7 @@
             <a:r>
               <a:rPr lang="en-US" sz="1500" dirty="0">
                 <a:solidFill>
-                  <a:srgbClr val="9DB0A4"/>
+                  <a:srgbClr val="B4B4B8"/>
                 </a:solidFill>
                 <a:latin typeface="Calibri" pitchFamily="34" charset="0"/>
                 <a:ea typeface="Calibri" pitchFamily="34" charset="-122"/>
@@ -7041,7 +7041,7 @@
             <a:r>
               <a:rPr lang="en-US" sz="1500" dirty="0">
                 <a:solidFill>
-                  <a:srgbClr val="9DB0A4"/>
+                  <a:srgbClr val="B4B4B8"/>
                 </a:solidFill>
                 <a:latin typeface="Calibri" pitchFamily="34" charset="0"/>
                 <a:ea typeface="Calibri" pitchFamily="34" charset="-122"/>
@@ -7062,7 +7062,7 @@
             <a:r>
               <a:rPr lang="en-US" sz="1500" dirty="0">
                 <a:solidFill>
-                  <a:srgbClr val="9DB0A4"/>
+                  <a:srgbClr val="B4B4B8"/>
                 </a:solidFill>
                 <a:latin typeface="Calibri" pitchFamily="34" charset="0"/>
                 <a:ea typeface="Calibri" pitchFamily="34" charset="-122"/>
@@ -7101,7 +7101,7 @@
             <a:r>
               <a:rPr lang="en-US" sz="1500" b="1" dirty="0">
                 <a:solidFill>
-                  <a:srgbClr val="FF9E3D"/>
+                  <a:srgbClr val="E2C28A"/>
                 </a:solidFill>
                 <a:latin typeface="Calibri" pitchFamily="34" charset="0"/>
                 <a:ea typeface="Calibri" pitchFamily="34" charset="-122"/>
@@ -7140,7 +7140,7 @@
             <a:r>
               <a:rPr lang="en-US" sz="3200" b="1" dirty="0">
                 <a:solidFill>
-                  <a:srgbClr val="EEF3EE"/>
+                  <a:srgbClr val="F5F5F7"/>
                 </a:solidFill>
                 <a:latin typeface="Arial" pitchFamily="34" charset="0"/>
                 <a:ea typeface="Arial" pitchFamily="34" charset="-122"/>
@@ -7179,7 +7179,7 @@
             <a:r>
               <a:rPr lang="en-US" sz="1500" dirty="0">
                 <a:solidFill>
-                  <a:srgbClr val="9DB0A4"/>
+                  <a:srgbClr val="B4B4B8"/>
                 </a:solidFill>
                 <a:latin typeface="Calibri" pitchFamily="34" charset="0"/>
                 <a:ea typeface="Calibri" pitchFamily="34" charset="-122"/>
@@ -7222,7 +7222,7 @@
             <a:r>
               <a:rPr lang="en-US" sz="1500" dirty="0">
                 <a:solidFill>
-                  <a:srgbClr val="EEF3EE"/>
+                  <a:srgbClr val="F5F5F7"/>
                 </a:solidFill>
                 <a:latin typeface="Calibri" pitchFamily="34" charset="0"/>
                 <a:ea typeface="Calibri" pitchFamily="34" charset="-122"/>
@@ -7243,7 +7243,7 @@
             <a:r>
               <a:rPr lang="en-US" sz="1500" dirty="0">
                 <a:solidFill>
-                  <a:srgbClr val="EEF3EE"/>
+                  <a:srgbClr val="F5F5F7"/>
                 </a:solidFill>
                 <a:latin typeface="Calibri" pitchFamily="34" charset="0"/>
                 <a:ea typeface="Calibri" pitchFamily="34" charset="-122"/>
@@ -7282,7 +7282,7 @@
             <a:r>
               <a:rPr lang="en-US" sz="1200" dirty="0">
                 <a:solidFill>
-                  <a:srgbClr val="6E8579"/>
+                  <a:srgbClr val="7E7E84"/>
                 </a:solidFill>
                 <a:latin typeface="Calibri" pitchFamily="34" charset="0"/>
                 <a:ea typeface="Calibri" pitchFamily="34" charset="-122"/>
@@ -7308,7 +7308,7 @@
     <p:bg>
       <p:bgPr>
         <a:solidFill>
-          <a:srgbClr val="0B0F14"/>
+          <a:srgbClr val="101010"/>
         </a:solidFill>
       </p:bgPr>
     </p:bg>
@@ -7341,7 +7341,7 @@
             <a:avLst/>
           </a:prstGeom>
           <a:solidFill>
-            <a:srgbClr val="FF9E3D"/>
+            <a:srgbClr val="FF9933"/>
           </a:solidFill>
           <a:ln/>
         </p:spPr>
@@ -7361,7 +7361,7 @@
             <a:avLst/>
           </a:prstGeom>
           <a:solidFill>
-            <a:srgbClr val="EEF3EE"/>
+            <a:srgbClr val="FFFFFF"/>
           </a:solidFill>
           <a:ln/>
         </p:spPr>
@@ -7381,7 +7381,7 @@
             <a:avLst/>
           </a:prstGeom>
           <a:solidFill>
-            <a:srgbClr val="27C08A"/>
+            <a:srgbClr val="138808"/>
           </a:solidFill>
           <a:ln/>
         </p:spPr>
@@ -7401,7 +7401,7 @@
             <a:avLst/>
           </a:prstGeom>
           <a:solidFill>
-            <a:srgbClr val="27C08A"/>
+            <a:srgbClr val="6FA8FF"/>
           </a:solidFill>
           <a:ln/>
         </p:spPr>
@@ -7433,7 +7433,7 @@
             <a:r>
               <a:rPr lang="en-US" sz="1500" b="1" spc="200" kern="0" dirty="0">
                 <a:solidFill>
-                  <a:srgbClr val="27C08A"/>
+                  <a:srgbClr val="6FA8FF"/>
                 </a:solidFill>
                 <a:latin typeface="Arial" pitchFamily="34" charset="0"/>
                 <a:ea typeface="Arial" pitchFamily="34" charset="-122"/>
@@ -7472,7 +7472,7 @@
             <a:r>
               <a:rPr lang="en-US" sz="3200" b="1" dirty="0">
                 <a:solidFill>
-                  <a:srgbClr val="EEF3EE"/>
+                  <a:srgbClr val="F5F5F7"/>
                 </a:solidFill>
                 <a:latin typeface="Arial" pitchFamily="34" charset="0"/>
                 <a:ea typeface="Arial" pitchFamily="34" charset="-122"/>
@@ -7501,11 +7501,11 @@
             </a:avLst>
           </a:prstGeom>
           <a:solidFill>
-            <a:srgbClr val="152017"/>
+            <a:srgbClr val="1C1C20"/>
           </a:solidFill>
           <a:ln w="12700">
             <a:solidFill>
-              <a:srgbClr val="2C4636"/>
+              <a:srgbClr val="34343A"/>
             </a:solidFill>
             <a:prstDash val="solid"/>
           </a:ln>
@@ -7545,7 +7545,7 @@
             <a:r>
               <a:rPr lang="en-US" sz="2100" b="1" dirty="0">
                 <a:solidFill>
-                  <a:srgbClr val="27C08A"/>
+                  <a:srgbClr val="6FA8FF"/>
                 </a:solidFill>
                 <a:latin typeface="Arial" pitchFamily="34" charset="0"/>
                 <a:ea typeface="Arial" pitchFamily="34" charset="-122"/>
@@ -7572,7 +7572,7 @@
             <a:avLst/>
           </a:prstGeom>
           <a:solidFill>
-            <a:srgbClr val="27C08A"/>
+            <a:srgbClr val="6FA8FF"/>
           </a:solidFill>
           <a:ln/>
         </p:spPr>
@@ -7604,7 +7604,7 @@
             <a:r>
               <a:rPr lang="en-US" sz="1800" b="1" dirty="0">
                 <a:solidFill>
-                  <a:srgbClr val="0B0F14"/>
+                  <a:srgbClr val="101010"/>
                 </a:solidFill>
                 <a:latin typeface="Arial" pitchFamily="34" charset="0"/>
                 <a:ea typeface="Arial" pitchFamily="34" charset="-122"/>
@@ -7643,7 +7643,7 @@
             <a:r>
               <a:rPr lang="en-US" sz="1900" b="1" dirty="0">
                 <a:solidFill>
-                  <a:srgbClr val="EEF3EE"/>
+                  <a:srgbClr val="F5F5F7"/>
                 </a:solidFill>
                 <a:latin typeface="Arial" pitchFamily="34" charset="0"/>
                 <a:ea typeface="Arial" pitchFamily="34" charset="-122"/>
@@ -7682,7 +7682,7 @@
             <a:r>
               <a:rPr lang="en-US" sz="1500" dirty="0">
                 <a:solidFill>
-                  <a:srgbClr val="9DB0A4"/>
+                  <a:srgbClr val="B4B4B8"/>
                 </a:solidFill>
                 <a:latin typeface="Calibri" pitchFamily="34" charset="0"/>
                 <a:ea typeface="Calibri" pitchFamily="34" charset="-122"/>
@@ -7709,7 +7709,7 @@
             <a:avLst/>
           </a:prstGeom>
           <a:solidFill>
-            <a:srgbClr val="27C08A"/>
+            <a:srgbClr val="6FA8FF"/>
           </a:solidFill>
           <a:ln/>
         </p:spPr>
@@ -7741,7 +7741,7 @@
             <a:r>
               <a:rPr lang="en-US" sz="1800" b="1" dirty="0">
                 <a:solidFill>
-                  <a:srgbClr val="0B0F14"/>
+                  <a:srgbClr val="101010"/>
                 </a:solidFill>
                 <a:latin typeface="Arial" pitchFamily="34" charset="0"/>
                 <a:ea typeface="Arial" pitchFamily="34" charset="-122"/>
@@ -7780,7 +7780,7 @@
             <a:r>
               <a:rPr lang="en-US" sz="1900" b="1" dirty="0">
                 <a:solidFill>
-                  <a:srgbClr val="EEF3EE"/>
+                  <a:srgbClr val="F5F5F7"/>
                 </a:solidFill>
                 <a:latin typeface="Arial" pitchFamily="34" charset="0"/>
                 <a:ea typeface="Arial" pitchFamily="34" charset="-122"/>
@@ -7819,7 +7819,7 @@
             <a:r>
               <a:rPr lang="en-US" sz="1500" dirty="0">
                 <a:solidFill>
-                  <a:srgbClr val="9DB0A4"/>
+                  <a:srgbClr val="B4B4B8"/>
                 </a:solidFill>
                 <a:latin typeface="Calibri" pitchFamily="34" charset="0"/>
                 <a:ea typeface="Calibri" pitchFamily="34" charset="-122"/>
@@ -7846,7 +7846,7 @@
             <a:avLst/>
           </a:prstGeom>
           <a:solidFill>
-            <a:srgbClr val="27C08A"/>
+            <a:srgbClr val="6FA8FF"/>
           </a:solidFill>
           <a:ln/>
         </p:spPr>
@@ -7878,7 +7878,7 @@
             <a:r>
               <a:rPr lang="en-US" sz="1800" b="1" dirty="0">
                 <a:solidFill>
-                  <a:srgbClr val="0B0F14"/>
+                  <a:srgbClr val="101010"/>
                 </a:solidFill>
                 <a:latin typeface="Arial" pitchFamily="34" charset="0"/>
                 <a:ea typeface="Arial" pitchFamily="34" charset="-122"/>
@@ -7917,7 +7917,7 @@
             <a:r>
               <a:rPr lang="en-US" sz="1900" b="1" dirty="0">
                 <a:solidFill>
-                  <a:srgbClr val="EEF3EE"/>
+                  <a:srgbClr val="F5F5F7"/>
                 </a:solidFill>
                 <a:latin typeface="Arial" pitchFamily="34" charset="0"/>
                 <a:ea typeface="Arial" pitchFamily="34" charset="-122"/>
@@ -7956,7 +7956,7 @@
             <a:r>
               <a:rPr lang="en-US" sz="1500" dirty="0">
                 <a:solidFill>
-                  <a:srgbClr val="9DB0A4"/>
+                  <a:srgbClr val="B4B4B8"/>
                 </a:solidFill>
                 <a:latin typeface="Calibri" pitchFamily="34" charset="0"/>
                 <a:ea typeface="Calibri" pitchFamily="34" charset="-122"/>
@@ -7985,11 +7985,11 @@
             </a:avLst>
           </a:prstGeom>
           <a:solidFill>
-            <a:srgbClr val="1B2A20"/>
+            <a:srgbClr val="26262B"/>
           </a:solidFill>
           <a:ln w="19050">
             <a:solidFill>
-              <a:srgbClr val="FF9E3D"/>
+              <a:srgbClr val="E2C28A"/>
             </a:solidFill>
             <a:prstDash val="solid"/>
           </a:ln>
@@ -8029,7 +8029,7 @@
             <a:r>
               <a:rPr lang="en-US" sz="1400" b="1" spc="200" kern="0" dirty="0">
                 <a:solidFill>
-                  <a:srgbClr val="FF9E3D"/>
+                  <a:srgbClr val="E2C28A"/>
                 </a:solidFill>
                 <a:latin typeface="Arial" pitchFamily="34" charset="0"/>
                 <a:ea typeface="Arial" pitchFamily="34" charset="-122"/>
@@ -8068,7 +8068,7 @@
             <a:r>
               <a:rPr lang="en-US" sz="1900" dirty="0">
                 <a:solidFill>
-                  <a:srgbClr val="EEF3EE"/>
+                  <a:srgbClr val="F5F5F7"/>
                 </a:solidFill>
                 <a:latin typeface="Calibri" pitchFamily="34" charset="0"/>
                 <a:ea typeface="Calibri" pitchFamily="34" charset="-122"/>
@@ -8097,11 +8097,11 @@
             </a:avLst>
           </a:prstGeom>
           <a:solidFill>
-            <a:srgbClr val="152017"/>
+            <a:srgbClr val="1C1C20"/>
           </a:solidFill>
           <a:ln w="12700">
             <a:solidFill>
-              <a:srgbClr val="2C4636"/>
+              <a:srgbClr val="34343A"/>
             </a:solidFill>
             <a:prstDash val="solid"/>
           </a:ln>
@@ -8144,7 +8144,7 @@
             <a:r>
               <a:rPr lang="en-US" sz="1800" b="1" dirty="0">
                 <a:solidFill>
-                  <a:srgbClr val="EEF3EE"/>
+                  <a:srgbClr val="F5F5F7"/>
                 </a:solidFill>
                 <a:latin typeface="Arial" pitchFamily="34" charset="0"/>
                 <a:ea typeface="Arial" pitchFamily="34" charset="-122"/>
@@ -8164,7 +8164,7 @@
             <a:r>
               <a:rPr lang="en-US" sz="1400" dirty="0">
                 <a:solidFill>
-                  <a:srgbClr val="9DB0A4"/>
+                  <a:srgbClr val="B4B4B8"/>
                 </a:solidFill>
                 <a:latin typeface="Calibri" pitchFamily="34" charset="0"/>
                 <a:ea typeface="Calibri" pitchFamily="34" charset="-122"/>
@@ -8184,7 +8184,7 @@
             <a:r>
               <a:rPr lang="en-US" sz="1800" b="1" dirty="0">
                 <a:solidFill>
-                  <a:srgbClr val="EEF3EE"/>
+                  <a:srgbClr val="F5F5F7"/>
                 </a:solidFill>
                 <a:latin typeface="Arial" pitchFamily="34" charset="0"/>
                 <a:ea typeface="Arial" pitchFamily="34" charset="-122"/>
@@ -8204,7 +8204,7 @@
             <a:r>
               <a:rPr lang="en-US" sz="1400" dirty="0">
                 <a:solidFill>
-                  <a:srgbClr val="9DB0A4"/>
+                  <a:srgbClr val="B4B4B8"/>
                 </a:solidFill>
                 <a:latin typeface="Calibri" pitchFamily="34" charset="0"/>
                 <a:ea typeface="Calibri" pitchFamily="34" charset="-122"/>
@@ -8224,7 +8224,7 @@
             <a:r>
               <a:rPr lang="en-US" sz="1400" b="1" dirty="0">
                 <a:solidFill>
-                  <a:srgbClr val="FF9E3D"/>
+                  <a:srgbClr val="E2C28A"/>
                 </a:solidFill>
                 <a:latin typeface="Calibri" pitchFamily="34" charset="0"/>
                 <a:ea typeface="Calibri" pitchFamily="34" charset="-122"/>
@@ -8309,7 +8309,7 @@
             <a:r>
               <a:rPr lang="en-US" sz="1300" b="1" dirty="0">
                 <a:solidFill>
-                  <a:srgbClr val="27C08A"/>
+                  <a:srgbClr val="6FA8FF"/>
                 </a:solidFill>
                 <a:latin typeface="Calibri" pitchFamily="34" charset="0"/>
                 <a:ea typeface="Calibri" pitchFamily="34" charset="-122"/>
@@ -8348,7 +8348,7 @@
             <a:r>
               <a:rPr lang="en-US" sz="1200" dirty="0">
                 <a:solidFill>
-                  <a:srgbClr val="6E8579"/>
+                  <a:srgbClr val="7E7E84"/>
                 </a:solidFill>
                 <a:latin typeface="Calibri" pitchFamily="34" charset="0"/>
                 <a:ea typeface="Calibri" pitchFamily="34" charset="-122"/>
